--- a/assets/presentations/diaporamas/P4-le-point-express.pptx
+++ b/assets/presentations/diaporamas/P4-le-point-express.pptx
@@ -6917,7 +6917,7 @@
                 </a:solidFill>
                 <a:latin typeface="Verdana"/>
               </a:rPr>
-              <a:t>Le moteur et ses trois types d'écran. 2 points jouables, 20 écrans écrits.</a:t>
+              <a:t>Le moteur et ses trois types d'écran. 6 points jouables, 60 écrans écrits.</a:t>
             </a:r>
           </a:p>
         </p:txBody>

--- a/assets/presentations/diaporamas/P4-le-point-express.pptx
+++ b/assets/presentations/diaporamas/P4-le-point-express.pptx
@@ -6917,7 +6917,7 @@
                 </a:solidFill>
                 <a:latin typeface="Verdana"/>
               </a:rPr>
-              <a:t>Le moteur et ses trois types d'écran. 6 points jouables, 60 écrans écrits.</a:t>
+              <a:t>Le moteur et ses trois types d'écran. 14 points jouables, 140 écrans écrits.</a:t>
             </a:r>
           </a:p>
         </p:txBody>

--- a/assets/presentations/diaporamas/P4-le-point-express.pptx
+++ b/assets/presentations/diaporamas/P4-le-point-express.pptx
@@ -11537,7 +11537,7 @@
         <p:spPr>
           <a:xfrm>
             <a:off x="886968" y="2084831"/>
-            <a:ext cx="2936138" cy="1061466"/>
+            <a:ext cx="2936138" cy="746760"/>
           </a:xfrm>
           <a:prstGeom prst="rect">
             <a:avLst/>
@@ -11556,13 +11556,13 @@
               </a:lnSpc>
             </a:pPr>
             <a:r>
-              <a:rPr sz="2300" b="1" i="0">
+              <a:rPr sz="2400" b="1" i="0">
                 <a:solidFill>
                   <a:srgbClr val="0D7A6F"/>
                 </a:solidFill>
                 <a:latin typeface="Verdana"/>
               </a:rPr>
-              <a:t>Le module · 4 h, le matin, en groupe</a:t>
+              <a:t>Le module · 4 h, le matin</a:t>
             </a:r>
           </a:p>
         </p:txBody>
@@ -11575,8 +11575,8 @@
         </p:nvSpPr>
         <p:spPr>
           <a:xfrm>
-            <a:off x="886968" y="3173730"/>
-            <a:ext cx="2936138" cy="2632710"/>
+            <a:off x="886968" y="2859024"/>
+            <a:ext cx="2936138" cy="2947416"/>
           </a:xfrm>
           <a:prstGeom prst="rect">
             <a:avLst/>
@@ -11661,7 +11661,7 @@
         <p:spPr>
           <a:xfrm>
             <a:off x="4627778" y="2084831"/>
-            <a:ext cx="2936138" cy="1061466"/>
+            <a:ext cx="2936138" cy="746760"/>
           </a:xfrm>
           <a:prstGeom prst="rect">
             <a:avLst/>
@@ -11680,7 +11680,7 @@
               </a:lnSpc>
             </a:pPr>
             <a:r>
-              <a:rPr sz="2300" b="1" i="0">
+              <a:rPr sz="2400" b="1" i="0">
                 <a:solidFill>
                   <a:srgbClr val="0D7A6F"/>
                 </a:solidFill>
@@ -11699,8 +11699,8 @@
         </p:nvSpPr>
         <p:spPr>
           <a:xfrm>
-            <a:off x="4627778" y="3173730"/>
-            <a:ext cx="2936138" cy="2632710"/>
+            <a:off x="4627778" y="2859024"/>
+            <a:ext cx="2936138" cy="2947416"/>
           </a:xfrm>
           <a:prstGeom prst="rect">
             <a:avLst/>
@@ -11785,7 +11785,7 @@
         <p:spPr>
           <a:xfrm>
             <a:off x="8368588" y="2084831"/>
-            <a:ext cx="2936138" cy="1061466"/>
+            <a:ext cx="2936138" cy="746760"/>
           </a:xfrm>
           <a:prstGeom prst="rect">
             <a:avLst/>
@@ -11804,7 +11804,7 @@
               </a:lnSpc>
             </a:pPr>
             <a:r>
-              <a:rPr sz="2300" b="1" i="0">
+              <a:rPr sz="2400" b="1" i="0">
                 <a:solidFill>
                   <a:srgbClr val="0D7A6F"/>
                 </a:solidFill>
@@ -11823,8 +11823,8 @@
         </p:nvSpPr>
         <p:spPr>
           <a:xfrm>
-            <a:off x="8368588" y="3173730"/>
-            <a:ext cx="2936138" cy="2632710"/>
+            <a:off x="8368588" y="2859024"/>
+            <a:ext cx="2936138" cy="2947416"/>
           </a:xfrm>
           <a:prstGeom prst="rect">
             <a:avLst/>
